--- a/docs/Complejidad_Migracion_NET_a_Java_Hexagonal.pptx
+++ b/docs/Complejidad_Migracion_NET_a_Java_Hexagonal.pptx
@@ -19,8 +19,7 @@
     <p:sldId id="267" r:id="rId13"/>
     <p:sldId id="268" r:id="rId14"/>
     <p:sldId id="269" r:id="rId15"/>
-    <p:sldId id="270" r:id="rId16"/>
-    <p:sldId id="271" r:id="rId17"/>
+    <p:sldId id="271" r:id="rId16"/>
   </p:sldIdLst>
   <p:sldSz cx="12192000" cy="6858000"/>
   <p:notesSz cx="6858000" cy="9144000"/>
@@ -317,7 +316,7 @@
           <a:p>
             <a:fld id="{5BCAD085-E8A6-8845-BD4E-CB4CCA059FC4}" type="datetimeFigureOut">
               <a:rPr lang="en-US" smtClean="0"/>
-              <a:t>7/28/2026</a:t>
+              <a:t>8/5/2026</a:t>
             </a:fld>
             <a:endParaRPr lang="en-US"/>
           </a:p>
@@ -485,7 +484,7 @@
           <a:p>
             <a:fld id="{5BCAD085-E8A6-8845-BD4E-CB4CCA059FC4}" type="datetimeFigureOut">
               <a:rPr lang="en-US" smtClean="0"/>
-              <a:t>7/28/2026</a:t>
+              <a:t>8/5/2026</a:t>
             </a:fld>
             <a:endParaRPr lang="en-US"/>
           </a:p>
@@ -663,7 +662,7 @@
           <a:p>
             <a:fld id="{5BCAD085-E8A6-8845-BD4E-CB4CCA059FC4}" type="datetimeFigureOut">
               <a:rPr lang="en-US" smtClean="0"/>
-              <a:t>7/28/2026</a:t>
+              <a:t>8/5/2026</a:t>
             </a:fld>
             <a:endParaRPr lang="en-US"/>
           </a:p>
@@ -831,7 +830,7 @@
           <a:p>
             <a:fld id="{5BCAD085-E8A6-8845-BD4E-CB4CCA059FC4}" type="datetimeFigureOut">
               <a:rPr lang="en-US" smtClean="0"/>
-              <a:t>7/28/2026</a:t>
+              <a:t>8/5/2026</a:t>
             </a:fld>
             <a:endParaRPr lang="en-US"/>
           </a:p>
@@ -1076,7 +1075,7 @@
           <a:p>
             <a:fld id="{5BCAD085-E8A6-8845-BD4E-CB4CCA059FC4}" type="datetimeFigureOut">
               <a:rPr lang="en-US" smtClean="0"/>
-              <a:t>7/28/2026</a:t>
+              <a:t>8/5/2026</a:t>
             </a:fld>
             <a:endParaRPr lang="en-US"/>
           </a:p>
@@ -1361,7 +1360,7 @@
           <a:p>
             <a:fld id="{5BCAD085-E8A6-8845-BD4E-CB4CCA059FC4}" type="datetimeFigureOut">
               <a:rPr lang="en-US" smtClean="0"/>
-              <a:t>7/28/2026</a:t>
+              <a:t>8/5/2026</a:t>
             </a:fld>
             <a:endParaRPr lang="en-US"/>
           </a:p>
@@ -1780,7 +1779,7 @@
           <a:p>
             <a:fld id="{5BCAD085-E8A6-8845-BD4E-CB4CCA059FC4}" type="datetimeFigureOut">
               <a:rPr lang="en-US" smtClean="0"/>
-              <a:t>7/28/2026</a:t>
+              <a:t>8/5/2026</a:t>
             </a:fld>
             <a:endParaRPr lang="en-US"/>
           </a:p>
@@ -1897,7 +1896,7 @@
           <a:p>
             <a:fld id="{5BCAD085-E8A6-8845-BD4E-CB4CCA059FC4}" type="datetimeFigureOut">
               <a:rPr lang="en-US" smtClean="0"/>
-              <a:t>7/28/2026</a:t>
+              <a:t>8/5/2026</a:t>
             </a:fld>
             <a:endParaRPr lang="en-US"/>
           </a:p>
@@ -1992,7 +1991,7 @@
           <a:p>
             <a:fld id="{5BCAD085-E8A6-8845-BD4E-CB4CCA059FC4}" type="datetimeFigureOut">
               <a:rPr lang="en-US" smtClean="0"/>
-              <a:t>7/28/2026</a:t>
+              <a:t>8/5/2026</a:t>
             </a:fld>
             <a:endParaRPr lang="en-US"/>
           </a:p>
@@ -2267,7 +2266,7 @@
           <a:p>
             <a:fld id="{5BCAD085-E8A6-8845-BD4E-CB4CCA059FC4}" type="datetimeFigureOut">
               <a:rPr lang="en-US" smtClean="0"/>
-              <a:t>7/28/2026</a:t>
+              <a:t>8/5/2026</a:t>
             </a:fld>
             <a:endParaRPr lang="en-US"/>
           </a:p>
@@ -2519,7 +2518,7 @@
           <a:p>
             <a:fld id="{5BCAD085-E8A6-8845-BD4E-CB4CCA059FC4}" type="datetimeFigureOut">
               <a:rPr lang="en-US" smtClean="0"/>
-              <a:t>7/28/2026</a:t>
+              <a:t>8/5/2026</a:t>
             </a:fld>
             <a:endParaRPr lang="en-US"/>
           </a:p>
@@ -2730,7 +2729,7 @@
           <a:p>
             <a:fld id="{5BCAD085-E8A6-8845-BD4E-CB4CCA059FC4}" type="datetimeFigureOut">
               <a:rPr lang="en-US" smtClean="0"/>
-              <a:t>7/28/2026</a:t>
+              <a:t>8/5/2026</a:t>
             </a:fld>
             <a:endParaRPr lang="en-US"/>
           </a:p>
@@ -3146,7 +3145,7 @@
           <a:lstStyle/>
           <a:p>
             <a:pPr algn="ctr"/>
-            <a:endParaRPr/>
+            <a:endParaRPr dirty="0"/>
           </a:p>
         </p:txBody>
       </p:sp>
@@ -3191,7 +3190,7 @@
           <a:lstStyle/>
           <a:p>
             <a:pPr algn="ctr"/>
-            <a:endParaRPr/>
+            <a:endParaRPr dirty="0"/>
           </a:p>
         </p:txBody>
       </p:sp>
@@ -3236,7 +3235,7 @@
           <a:lstStyle/>
           <a:p>
             <a:pPr algn="ctr"/>
-            <a:endParaRPr/>
+            <a:endParaRPr dirty="0"/>
           </a:p>
         </p:txBody>
       </p:sp>
@@ -3268,7 +3267,7 @@
               </a:lnSpc>
             </a:pPr>
             <a:r>
-              <a:rPr sz="1500" b="1" i="0">
+              <a:rPr sz="1500" b="1" i="0" dirty="0">
                 <a:solidFill>
                   <a:srgbClr val="B8C2CC"/>
                 </a:solidFill>
@@ -3307,29 +3306,47 @@
               </a:lnSpc>
             </a:pPr>
             <a:r>
+              <a:rPr sz="3800" b="1" i="0" dirty="0">
+                <a:solidFill>
+                  <a:srgbClr val="FFFFFF"/>
+                </a:solidFill>
+                <a:latin typeface="Calibri"/>
+              </a:rPr>
+              <a:t>De .NET Onion a Java Hexagonal:</a:t>
+            </a:r>
+          </a:p>
+          <a:p>
+            <a:pPr algn="l">
+              <a:lnSpc>
+                <a:spcPct val="108000"/>
+              </a:lnSpc>
+            </a:pPr>
+            <a:r>
+              <a:rPr sz="3800" b="1" i="0" dirty="0">
+                <a:solidFill>
+                  <a:srgbClr val="FFFFFF"/>
+                </a:solidFill>
+                <a:latin typeface="Calibri"/>
+              </a:rPr>
+              <a:t>la </a:t>
+            </a:r>
+            <a:r>
+              <a:rPr sz="3800" b="1" i="0" dirty="0" err="1">
+                <a:solidFill>
+                  <a:srgbClr val="FFFFFF"/>
+                </a:solidFill>
+                <a:latin typeface="Calibri"/>
+              </a:rPr>
+              <a:t>historia</a:t>
+            </a:r>
+            <a:r>
               <a:rPr sz="3800" b="1" i="0">
                 <a:solidFill>
                   <a:srgbClr val="FFFFFF"/>
                 </a:solidFill>
                 <a:latin typeface="Calibri"/>
               </a:rPr>
-              <a:t>De .NET Onion a Java Hexagonal:</a:t>
-            </a:r>
-          </a:p>
-          <a:p>
-            <a:pPr algn="l">
-              <a:lnSpc>
-                <a:spcPct val="108000"/>
-              </a:lnSpc>
-            </a:pPr>
-            <a:r>
-              <a:rPr sz="3800" b="1" i="0">
-                <a:solidFill>
-                  <a:srgbClr val="FFFFFF"/>
-                </a:solidFill>
-                <a:latin typeface="Calibri"/>
-              </a:rPr>
-              <a:t>la historia real de una migracion</a:t>
+              <a:t> real de una migracion</a:t>
             </a:r>
           </a:p>
         </p:txBody>
@@ -4036,7 +4053,7 @@
                 </a:solidFill>
                 <a:latin typeface="Calibri"/>
               </a:rPr>
-              <a:t>La aplicación fallaba al arrancar con SchemaManagementException: missing table [...] — como si las 8 migraciones de base de datos nunca hubieran existido.</a:t>
+              <a:t>El backend fallaba al arrancar con un error de base de datos (“missing table [...]”) — como si las 8 migraciones (los scripts que crean las tablas) nunca hubieran existido.</a:t>
             </a:r>
           </a:p>
         </p:txBody>
@@ -4206,7 +4223,7 @@
                 </a:solidFill>
                 <a:latin typeface="Calibri"/>
               </a:rPr>
-              <a:t>Spring Boot 4.x dejó de auto-configurar Flyway solo por tener flyway-core en el classpath: modularizó la autoconfiguración y ahora exige el starter explícito spring-boot-starter-flyway. flyway-core compilaba perfecto — el proyecto simplemente no sabía que ya no bastaba.</a:t>
+              <a:t>Flyway es la herramienta que aplica automáticamente esos scripts de base de datos cada vez que arranca el backend. Bastaba con tener su librería agregada al proyecto para que Spring la activara sola —hasta la nueva versión de Spring Boot (4.x), que ahora exige agregar una librería adicional explícita para activarla. El proyecto compilaba perfecto — solo que ya nadie ejecutaba esos scripts al arrancar.</a:t>
             </a:r>
           </a:p>
         </p:txBody>
@@ -4376,7 +4393,7 @@
                 </a:solidFill>
                 <a:latin typeface="Calibri"/>
               </a:rPr>
-              <a:t>Se reemplazó la dependencia directa flyway-core por spring-boot-starter-flyway en el POM del adaptador de persistencia. Una linea de cambio, cero líneas de código Java.</a:t>
+              <a:t>Se cambió una sola línea en el archivo de dependencias (pom.xml) del módulo de persistencia: la librería flyway-core por spring-boot-starter-flyway. Cero líneas de código Java tocadas.</a:t>
             </a:r>
           </a:p>
         </p:txBody>
@@ -4415,7 +4432,7 @@
                 </a:solidFill>
                 <a:latin typeface="Calibri"/>
               </a:rPr>
-              <a:t>No es un error de quien migró: es el framework cambiando las reglas de auto-configuración en su propia versión mayor, mientras el proyecto se armaba encima.</a:t>
+              <a:t>No es un error de quien migró: es el framework (Spring) cambiando sus reglas por defecto en una versión mayor, justo mientras se armaba el proyecto encima.</a:t>
             </a:r>
           </a:p>
         </p:txBody>
@@ -4856,7 +4873,7 @@
                 </a:solidFill>
                 <a:latin typeface="Calibri"/>
               </a:rPr>
-              <a:t>GET /api/productos devolvia error 500 con: function lower(bytea) does not exist — justo el caso mas común, buscar sin escribir texto de filtro.</a:t>
+              <a:t>La petición GET /api/productos (listar productos) devolvía error 500 con “function lower(bytea) does not exist” — justo el caso más común: buscar sin escribir texto de filtro.</a:t>
             </a:r>
           </a:p>
         </p:txBody>
@@ -5026,7 +5043,7 @@
                 </a:solidFill>
                 <a:latin typeface="Calibri"/>
               </a:rPr>
-              <a:t>La consulta armaba el patron con lower(concat('%', :texto, '%')). Cuando :texto llega null, el driver JDBC de PostgreSQL no puede inferir su tipo dentro de concat()/lower() y lo tipa como bytea — y lower(bytea) no existe en Postgres.</a:t>
+              <a:t>La consulta armaba el texto de búsqueda con lower(concat('%', :texto, '%')) directamente en SQL. Cuando el filtro llega vacío (null), el conector que conecta Java con Postgres (JDBC) no logra adivinar de qué tipo es ese null dentro de concat()/lower(), y por defecto lo trata como dato binario (bytea) — y Postgres no tiene una función lower() para datos binarios.</a:t>
             </a:r>
           </a:p>
         </p:txBody>
@@ -5196,7 +5213,7 @@
                 </a:solidFill>
                 <a:latin typeface="Calibri"/>
               </a:rPr>
-              <a:t>Se armó el patrón %texto% ya en minúsculas en Java, y se pasó como un unico parámetro de texto usado directo en LIKE, sin concat()/lower() en SQL.</a:t>
+              <a:t>Se armó el patrón %texto% ya en minúsculas del lado de Java (no en SQL), y se envió como un solo parámetro de texto usado directo en el LIKE — sin concat() ni lower() en la consulta SQL.</a:t>
             </a:r>
           </a:p>
         </p:txBody>
@@ -5676,7 +5693,7 @@
                 </a:solidFill>
                 <a:latin typeface="Calibri"/>
               </a:rPr>
-              <a:t>El frontend (localhost:5173) y el backend (localhost:8088) son origenes distintos; sin CORS el navegador bloquea todo fetch con preflight fallido. El .NET original si lo tenia (Program.cs).</a:t>
+              <a:t>El frontend (localhost:5173) y el backend (localhost:8088) son direcciones distintas para el navegador. Por seguridad, el navegador bloquea por defecto que una página pida datos a otra dirección si el backend no lo autoriza explícitamente (esto se llama CORS). Sin esa autorización, el navegador rechazaba toda petición. El proyecto .NET original sí la tenía configurada (Program.cs).</a:t>
             </a:r>
           </a:p>
         </p:txBody>
@@ -5821,7 +5838,7 @@
         <p:spPr>
           <a:xfrm>
             <a:off x="868680" y="4370832"/>
-            <a:ext cx="10149840" cy="868680"/>
+            <a:ext cx="10149840" cy="231538"/>
           </a:xfrm>
           <a:prstGeom prst="rect">
             <a:avLst/>
@@ -5840,13 +5857,139 @@
               </a:lnSpc>
             </a:pPr>
             <a:r>
-              <a:rPr sz="1300" b="0" i="0">
+              <a:rPr sz="1300" b="0" i="0" dirty="0">
                 <a:solidFill>
                   <a:srgbClr val="667085"/>
                 </a:solidFill>
                 <a:latin typeface="Calibri"/>
               </a:rPr>
-              <a:t>5 de 8 contextos se implementaron con el prefijo minimo del Word (/api/v1/...), pero el frontend real llama /api/... sin version — 5 agentes de reconciliacion tuvieron que corregirlo despues.</a:t>
+              <a:t>5 de 8 </a:t>
+            </a:r>
+            <a:r>
+              <a:rPr sz="1300" b="0" i="0" dirty="0" err="1">
+                <a:solidFill>
+                  <a:srgbClr val="667085"/>
+                </a:solidFill>
+                <a:latin typeface="Calibri"/>
+              </a:rPr>
+              <a:t>contextos</a:t>
+            </a:r>
+            <a:r>
+              <a:rPr sz="1300" b="0" i="0" dirty="0">
+                <a:solidFill>
+                  <a:srgbClr val="667085"/>
+                </a:solidFill>
+                <a:latin typeface="Calibri"/>
+              </a:rPr>
+              <a:t> se </a:t>
+            </a:r>
+            <a:r>
+              <a:rPr sz="1300" b="0" i="0" dirty="0" err="1">
+                <a:solidFill>
+                  <a:srgbClr val="667085"/>
+                </a:solidFill>
+                <a:latin typeface="Calibri"/>
+              </a:rPr>
+              <a:t>implementaron</a:t>
+            </a:r>
+            <a:r>
+              <a:rPr sz="1300" b="0" i="0" dirty="0">
+                <a:solidFill>
+                  <a:srgbClr val="667085"/>
+                </a:solidFill>
+                <a:latin typeface="Calibri"/>
+              </a:rPr>
+              <a:t> con el </a:t>
+            </a:r>
+            <a:r>
+              <a:rPr sz="1300" b="0" i="0" dirty="0" err="1">
+                <a:solidFill>
+                  <a:srgbClr val="667085"/>
+                </a:solidFill>
+                <a:latin typeface="Calibri"/>
+              </a:rPr>
+              <a:t>prefijo</a:t>
+            </a:r>
+            <a:r>
+              <a:rPr sz="1300" b="0" i="0" dirty="0">
+                <a:solidFill>
+                  <a:srgbClr val="667085"/>
+                </a:solidFill>
+                <a:latin typeface="Calibri"/>
+              </a:rPr>
+              <a:t> </a:t>
+            </a:r>
+            <a:r>
+              <a:rPr sz="1300" b="0" i="0" dirty="0" err="1">
+                <a:solidFill>
+                  <a:srgbClr val="667085"/>
+                </a:solidFill>
+                <a:latin typeface="Calibri"/>
+              </a:rPr>
+              <a:t>minimo</a:t>
+            </a:r>
+            <a:r>
+              <a:rPr sz="1300" b="0" i="0" dirty="0">
+                <a:solidFill>
+                  <a:srgbClr val="667085"/>
+                </a:solidFill>
+                <a:latin typeface="Calibri"/>
+              </a:rPr>
+              <a:t> del Word (/</a:t>
+            </a:r>
+            <a:r>
+              <a:rPr sz="1300" b="0" i="0" dirty="0" err="1">
+                <a:solidFill>
+                  <a:srgbClr val="667085"/>
+                </a:solidFill>
+                <a:latin typeface="Calibri"/>
+              </a:rPr>
+              <a:t>api</a:t>
+            </a:r>
+            <a:r>
+              <a:rPr sz="1300" b="0" i="0" dirty="0">
+                <a:solidFill>
+                  <a:srgbClr val="667085"/>
+                </a:solidFill>
+                <a:latin typeface="Calibri"/>
+              </a:rPr>
+              <a:t>/v1/...), </a:t>
+            </a:r>
+            <a:r>
+              <a:rPr sz="1300" b="0" i="0" dirty="0" err="1">
+                <a:solidFill>
+                  <a:srgbClr val="667085"/>
+                </a:solidFill>
+                <a:latin typeface="Calibri"/>
+              </a:rPr>
+              <a:t>pero</a:t>
+            </a:r>
+            <a:r>
+              <a:rPr sz="1300" b="0" i="0" dirty="0">
+                <a:solidFill>
+                  <a:srgbClr val="667085"/>
+                </a:solidFill>
+                <a:latin typeface="Calibri"/>
+              </a:rPr>
+              <a:t> el frontend real llama /</a:t>
+            </a:r>
+            <a:r>
+              <a:rPr sz="1300" b="0" i="0" dirty="0" err="1">
+                <a:solidFill>
+                  <a:srgbClr val="667085"/>
+                </a:solidFill>
+                <a:latin typeface="Calibri"/>
+              </a:rPr>
+              <a:t>api</a:t>
+            </a:r>
+            <a:r>
+              <a:rPr sz="1300" b="0" i="0" dirty="0">
+                <a:solidFill>
+                  <a:srgbClr val="667085"/>
+                </a:solidFill>
+                <a:latin typeface="Calibri"/>
+              </a:rPr>
+              <a:t>/... sin version</a:t>
             </a:r>
           </a:p>
         </p:txBody>
@@ -6401,7 +6544,7 @@
                 </a:solidFill>
                 <a:latin typeface="Calibri"/>
               </a:rPr>
-              <a:t>UUID nativo vs UNIQUEIDENTIFIER, BOOLEAN vs BIT, LIMIT/OFFSET vs TOP/OFFSET-FETCH, RETURNING vs OUTPUT.</a:t>
+              <a:t>Cada motor de base de datos usa sus propias palabras clave; hay que reescribir una por una: UUID nativo vs UNIQUEIDENTIFIER, BOOLEAN vs BIT, LIMIT/OFFSET vs TOP/OFFSET-FETCH, RETURNING vs OUTPUT.</a:t>
             </a:r>
           </a:p>
         </p:txBody>
@@ -6571,7 +6714,7 @@
                 </a:solidFill>
                 <a:latin typeface="Calibri"/>
               </a:rPr>
-              <a:t>PostgreSQLDialect → SQLServerDialect. Ya vimos hoy que el modo validate es estricto: cualquier diferencia sutil de tipos rompe el arranque.</a:t>
+              <a:t>Hibernate es la librería que traduce los objetos Java a SQL; necesita saber para qué motor traducir (su “dialecto”): PostgreSQLDialect → SQLServerDialect. Ya vimos hoy que Hibernate revisa el esquema de la base de datos al arrancar y es estricto: cualquier diferencia sutil de tipos rompe el arranque.</a:t>
             </a:r>
           </a:p>
         </p:txBody>
@@ -6741,7 +6884,7 @@
                 </a:solidFill>
                 <a:latin typeface="Calibri"/>
               </a:rPr>
-              <a:t>SELECT FOR UPDATE (Postgres) vs WITH (UPDLOCK, ROWLOCK) (SQL Server) — justo la sintaxis que protege el stock y las recetas retenidas.</a:t>
+              <a:t>SELECT FOR UPDATE (Postgres) vs WITH (UPDLOCK, ROWLOCK) (SQL Server): la instrucción que bloquea una fila para que dos cajeros no vendan el mismo lote de stock al mismo tiempo — cambia de sintaxis entre motores.</a:t>
             </a:r>
           </a:p>
         </p:txBody>
@@ -6911,7 +7054,7 @@
                 </a:solidFill>
                 <a:latin typeface="Calibri"/>
               </a:rPr>
-              <a:t>lower(bytea) es un bug de Postgres. SQL Server es case-insensitive por default en muchas collations — ahi el riesgo hubiera sido el opuesto: falsos positivos en busquedas.</a:t>
+              <a:t>lower(bytea) es un bug propio de Postgres. SQL Server, en muchas de sus configuraciones de texto (collations), no distingue mayúsculas de minúsculas por defecto — ahí el riesgo habría sido el opuesto: búsquedas que traen resultados de más (falsos positivos).</a:t>
             </a:r>
           </a:p>
         </p:txBody>
@@ -7779,7 +7922,7 @@
                 </a:solidFill>
                 <a:latin typeface="Calibri"/>
               </a:rPr>
-              <a:t>dialecto + driver</a:t>
+              <a:t>dialecto SQL + conector BD</a:t>
             </a:r>
           </a:p>
         </p:txBody>
@@ -7883,7 +8026,7 @@
                 </a:solidFill>
                 <a:latin typeface="Calibri"/>
               </a:rPr>
-              <a:t>locking + Testcontainers</a:t>
+              <a:t>bloqueos + pruebas con BD real</a:t>
             </a:r>
           </a:p>
         </p:txBody>
@@ -7916,13 +8059,193 @@
               </a:lnSpc>
             </a:pPr>
             <a:r>
-              <a:rPr sz="1350" b="1" i="1">
+              <a:rPr sz="1350" b="1" i="1" dirty="0">
                 <a:solidFill>
                   <a:srgbClr val="1F2A37"/>
                 </a:solidFill>
                 <a:latin typeface="Calibri"/>
               </a:rPr>
-              <a:t>Con 2 ejes moviendose hay 1 costura (y ya dio 3 bugs). Con 3 ejes hay 3 costuras — el riesgo no suma, multiplica.</a:t>
+              <a:t>Con 2 </a:t>
+            </a:r>
+            <a:r>
+              <a:rPr sz="1350" b="1" i="1" dirty="0" err="1">
+                <a:solidFill>
+                  <a:srgbClr val="1F2A37"/>
+                </a:solidFill>
+                <a:latin typeface="Calibri"/>
+              </a:rPr>
+              <a:t>ejes</a:t>
+            </a:r>
+            <a:r>
+              <a:rPr sz="1350" b="1" i="1" dirty="0">
+                <a:solidFill>
+                  <a:srgbClr val="1F2A37"/>
+                </a:solidFill>
+                <a:latin typeface="Calibri"/>
+              </a:rPr>
+              <a:t> </a:t>
+            </a:r>
+            <a:r>
+              <a:rPr sz="1350" b="1" i="1" dirty="0" err="1">
+                <a:solidFill>
+                  <a:srgbClr val="1F2A37"/>
+                </a:solidFill>
+                <a:latin typeface="Calibri"/>
+              </a:rPr>
+              <a:t>moviendose</a:t>
+            </a:r>
+            <a:r>
+              <a:rPr sz="1350" b="1" i="1" dirty="0">
+                <a:solidFill>
+                  <a:srgbClr val="1F2A37"/>
+                </a:solidFill>
+                <a:latin typeface="Calibri"/>
+              </a:rPr>
+              <a:t> hay 1 </a:t>
+            </a:r>
+            <a:r>
+              <a:rPr sz="1350" b="1" i="1" dirty="0" err="1">
+                <a:solidFill>
+                  <a:srgbClr val="1F2A37"/>
+                </a:solidFill>
+                <a:latin typeface="Calibri"/>
+              </a:rPr>
+              <a:t>costura</a:t>
+            </a:r>
+            <a:r>
+              <a:rPr sz="1350" b="1" i="1" dirty="0">
+                <a:solidFill>
+                  <a:srgbClr val="1F2A37"/>
+                </a:solidFill>
+                <a:latin typeface="Calibri"/>
+              </a:rPr>
+              <a:t> (y </a:t>
+            </a:r>
+            <a:r>
+              <a:rPr sz="1350" b="1" i="1" dirty="0" err="1">
+                <a:solidFill>
+                  <a:srgbClr val="1F2A37"/>
+                </a:solidFill>
+                <a:latin typeface="Calibri"/>
+              </a:rPr>
+              <a:t>ya</a:t>
+            </a:r>
+            <a:r>
+              <a:rPr sz="1350" b="1" i="1" dirty="0">
+                <a:solidFill>
+                  <a:srgbClr val="1F2A37"/>
+                </a:solidFill>
+                <a:latin typeface="Calibri"/>
+              </a:rPr>
+              <a:t> </a:t>
+            </a:r>
+            <a:r>
+              <a:rPr sz="1350" b="1" i="1" dirty="0" err="1">
+                <a:solidFill>
+                  <a:srgbClr val="1F2A37"/>
+                </a:solidFill>
+                <a:latin typeface="Calibri"/>
+              </a:rPr>
+              <a:t>dio</a:t>
+            </a:r>
+            <a:r>
+              <a:rPr sz="1350" b="1" i="1" dirty="0">
+                <a:solidFill>
+                  <a:srgbClr val="1F2A37"/>
+                </a:solidFill>
+                <a:latin typeface="Calibri"/>
+              </a:rPr>
+              <a:t> 3 bugs). Con 3 </a:t>
+            </a:r>
+            <a:r>
+              <a:rPr sz="1350" b="1" i="1" dirty="0" err="1">
+                <a:solidFill>
+                  <a:srgbClr val="1F2A37"/>
+                </a:solidFill>
+                <a:latin typeface="Calibri"/>
+              </a:rPr>
+              <a:t>ejes</a:t>
+            </a:r>
+            <a:r>
+              <a:rPr sz="1350" b="1" i="1" dirty="0">
+                <a:solidFill>
+                  <a:srgbClr val="1F2A37"/>
+                </a:solidFill>
+                <a:latin typeface="Calibri"/>
+              </a:rPr>
+              <a:t> hay 3 </a:t>
+            </a:r>
+            <a:r>
+              <a:rPr sz="1350" b="1" i="1" dirty="0" err="1">
+                <a:solidFill>
+                  <a:srgbClr val="1F2A37"/>
+                </a:solidFill>
+                <a:latin typeface="Calibri"/>
+              </a:rPr>
+              <a:t>costuras</a:t>
+            </a:r>
+            <a:r>
+              <a:rPr sz="1350" b="1" i="1" dirty="0">
+                <a:solidFill>
+                  <a:srgbClr val="1F2A37"/>
+                </a:solidFill>
+                <a:latin typeface="Calibri"/>
+              </a:rPr>
+              <a:t> — el </a:t>
+            </a:r>
+            <a:r>
+              <a:rPr sz="1350" b="1" i="1" dirty="0" err="1">
+                <a:solidFill>
+                  <a:srgbClr val="1F2A37"/>
+                </a:solidFill>
+                <a:latin typeface="Calibri"/>
+              </a:rPr>
+              <a:t>riesgo</a:t>
+            </a:r>
+            <a:r>
+              <a:rPr sz="1350" b="1" i="1" dirty="0">
+                <a:solidFill>
+                  <a:srgbClr val="1F2A37"/>
+                </a:solidFill>
+                <a:latin typeface="Calibri"/>
+              </a:rPr>
+              <a:t> no </a:t>
+            </a:r>
+            <a:r>
+              <a:rPr sz="1350" b="1" i="1" dirty="0" err="1">
+                <a:solidFill>
+                  <a:srgbClr val="1F2A37"/>
+                </a:solidFill>
+                <a:latin typeface="Calibri"/>
+              </a:rPr>
+              <a:t>suma</a:t>
+            </a:r>
+            <a:r>
+              <a:rPr sz="1350" b="1" i="1" dirty="0">
+                <a:solidFill>
+                  <a:srgbClr val="1F2A37"/>
+                </a:solidFill>
+                <a:latin typeface="Calibri"/>
+              </a:rPr>
+              <a:t>, </a:t>
+            </a:r>
+            <a:r>
+              <a:rPr sz="1350" b="1" i="1" dirty="0" err="1">
+                <a:solidFill>
+                  <a:srgbClr val="1F2A37"/>
+                </a:solidFill>
+                <a:latin typeface="Calibri"/>
+              </a:rPr>
+              <a:t>multiplica</a:t>
+            </a:r>
+            <a:r>
+              <a:rPr sz="1350" b="1" i="1" dirty="0">
+                <a:solidFill>
+                  <a:srgbClr val="1F2A37"/>
+                </a:solidFill>
+                <a:latin typeface="Calibri"/>
+              </a:rPr>
+              <a:t>.</a:t>
             </a:r>
           </a:p>
         </p:txBody>
@@ -8077,448 +8400,6 @@
       </p:sp>
       <p:sp>
         <p:nvSpPr>
-          <p:cNvPr id="3" name="TextBox 2"/>
-          <p:cNvSpPr txBox="1"/>
-          <p:nvPr/>
-        </p:nvSpPr>
-        <p:spPr>
-          <a:xfrm>
-            <a:off x="502920" y="457200"/>
-            <a:ext cx="10515600" cy="320040"/>
-          </a:xfrm>
-          <a:prstGeom prst="rect">
-            <a:avLst/>
-          </a:prstGeom>
-          <a:noFill/>
-        </p:spPr>
-        <p:txBody>
-          <a:bodyPr wrap="square" lIns="0" tIns="0" rIns="0" bIns="0" anchor="t">
-            <a:spAutoFit/>
-          </a:bodyPr>
-          <a:lstStyle/>
-          <a:p>
-            <a:pPr algn="l">
-              <a:lnSpc>
-                <a:spcPct val="115000"/>
-              </a:lnSpc>
-            </a:pPr>
-            <a:r>
-              <a:rPr sz="1300" b="1" i="0">
-                <a:solidFill>
-                  <a:srgbClr val="E87A1E"/>
-                </a:solidFill>
-                <a:latin typeface="Calibri"/>
-              </a:rPr>
-              <a:t>QUE NOS BLINDO DE ANTEMANO</a:t>
-            </a:r>
-          </a:p>
-        </p:txBody>
-      </p:sp>
-      <p:sp>
-        <p:nvSpPr>
-          <p:cNvPr id="4" name="TextBox 3"/>
-          <p:cNvSpPr txBox="1"/>
-          <p:nvPr/>
-        </p:nvSpPr>
-        <p:spPr>
-          <a:xfrm>
-            <a:off x="502920" y="841248"/>
-            <a:ext cx="11155680" cy="822960"/>
-          </a:xfrm>
-          <a:prstGeom prst="rect">
-            <a:avLst/>
-          </a:prstGeom>
-          <a:noFill/>
-        </p:spPr>
-        <p:txBody>
-          <a:bodyPr wrap="square" lIns="0" tIns="0" rIns="0" bIns="0" anchor="t">
-            <a:spAutoFit/>
-          </a:bodyPr>
-          <a:lstStyle/>
-          <a:p>
-            <a:pPr algn="l">
-              <a:lnSpc>
-                <a:spcPct val="115000"/>
-              </a:lnSpc>
-            </a:pPr>
-            <a:r>
-              <a:rPr sz="3000" b="1" i="0">
-                <a:solidFill>
-                  <a:srgbClr val="1F2A37"/>
-                </a:solidFill>
-                <a:latin typeface="Calibri"/>
-              </a:rPr>
-              <a:t>Decisiones que ya pagaban este riesgo antes de que apareciera</a:t>
-            </a:r>
-          </a:p>
-        </p:txBody>
-      </p:sp>
-      <p:sp>
-        <p:nvSpPr>
-          <p:cNvPr id="5" name="Rectangle 4"/>
-          <p:cNvSpPr/>
-          <p:nvPr/>
-        </p:nvSpPr>
-        <p:spPr>
-          <a:xfrm>
-            <a:off x="502920" y="1554480"/>
-            <a:ext cx="640080" cy="40640"/>
-          </a:xfrm>
-          <a:prstGeom prst="rect">
-            <a:avLst/>
-          </a:prstGeom>
-          <a:solidFill>
-            <a:srgbClr val="E87A1E"/>
-          </a:solidFill>
-          <a:ln>
-            <a:noFill/>
-          </a:ln>
-          <a:effectLst/>
-        </p:spPr>
-        <p:style>
-          <a:lnRef idx="1">
-            <a:schemeClr val="accent1"/>
-          </a:lnRef>
-          <a:fillRef idx="3">
-            <a:schemeClr val="accent1"/>
-          </a:fillRef>
-          <a:effectRef idx="2">
-            <a:schemeClr val="accent1"/>
-          </a:effectRef>
-          <a:fontRef idx="minor">
-            <a:schemeClr val="lt1"/>
-          </a:fontRef>
-        </p:style>
-        <p:txBody>
-          <a:bodyPr rtlCol="0" anchor="ctr"/>
-          <a:lstStyle/>
-          <a:p>
-            <a:pPr algn="ctr"/>
-            <a:endParaRPr/>
-          </a:p>
-        </p:txBody>
-      </p:sp>
-      <p:sp>
-        <p:nvSpPr>
-          <p:cNvPr id="6" name="TextBox 5"/>
-          <p:cNvSpPr txBox="1"/>
-          <p:nvPr/>
-        </p:nvSpPr>
-        <p:spPr>
-          <a:xfrm>
-            <a:off x="548640" y="1874519"/>
-            <a:ext cx="10881360" cy="457200"/>
-          </a:xfrm>
-          <a:prstGeom prst="rect">
-            <a:avLst/>
-          </a:prstGeom>
-          <a:noFill/>
-        </p:spPr>
-        <p:txBody>
-          <a:bodyPr wrap="square" lIns="0" tIns="0" rIns="0" bIns="0">
-            <a:spAutoFit/>
-          </a:bodyPr>
-          <a:lstStyle/>
-          <a:p>
-            <a:pPr>
-              <a:lnSpc>
-                <a:spcPct val="118000"/>
-              </a:lnSpc>
-              <a:spcAft>
-                <a:spcPts val="2304"/>
-              </a:spcAft>
-            </a:pPr>
-            <a:r>
-              <a:rPr sz="1500" b="1">
-                <a:solidFill>
-                  <a:srgbClr val="16A34A"/>
-                </a:solidFill>
-                <a:latin typeface="Calibri"/>
-              </a:rPr>
-              <a:t>▸  </a:t>
-            </a:r>
-            <a:r>
-              <a:rPr sz="1500" b="1">
-                <a:solidFill>
-                  <a:srgbClr val="1F2A37"/>
-                </a:solidFill>
-                <a:latin typeface="Calibri"/>
-              </a:rPr>
-              <a:t>IDs generados en el dominio, no en la base de datos. </a:t>
-            </a:r>
-            <a:r>
-              <a:rPr sz="1500" b="0">
-                <a:solidFill>
-                  <a:srgbClr val="1F2A37"/>
-                </a:solidFill>
-                <a:latin typeface="Calibri"/>
-              </a:rPr>
-              <a:t>Cada entidad hereda de Entidad y genera su propio UUID en Java. Si algun dia cambia el motor de BD, la identidad de cada fila no depende de como ese motor genera claves.</a:t>
-            </a:r>
-          </a:p>
-          <a:p>
-            <a:pPr>
-              <a:lnSpc>
-                <a:spcPct val="118000"/>
-              </a:lnSpc>
-              <a:spcAft>
-                <a:spcPts val="2304"/>
-              </a:spcAft>
-            </a:pPr>
-            <a:r>
-              <a:rPr sz="1500" b="1">
-                <a:solidFill>
-                  <a:srgbClr val="16A34A"/>
-                </a:solidFill>
-                <a:latin typeface="Calibri"/>
-              </a:rPr>
-              <a:t>▸  </a:t>
-            </a:r>
-            <a:r>
-              <a:rPr sz="1500" b="1">
-                <a:solidFill>
-                  <a:srgbClr val="1F2A37"/>
-                </a:solidFill>
-                <a:latin typeface="Calibri"/>
-              </a:rPr>
-              <a:t>Puertos y adaptadores explicitos desde el dia uno. </a:t>
-            </a:r>
-            <a:r>
-              <a:rPr sz="1500" b="0">
-                <a:solidFill>
-                  <a:srgbClr val="1F2A37"/>
-                </a:solidFill>
-                <a:latin typeface="Calibri"/>
-              </a:rPr>
-              <a:t>Los casos de uso nunca conocen JPA ni Postgres directamente — solo interfaces. El bug de lower(bytea) se arreglo en UN adaptador, sin tocar dominio ni aplicacion.</a:t>
-            </a:r>
-          </a:p>
-          <a:p>
-            <a:pPr>
-              <a:lnSpc>
-                <a:spcPct val="118000"/>
-              </a:lnSpc>
-              <a:spcAft>
-                <a:spcPts val="2304"/>
-              </a:spcAft>
-            </a:pPr>
-            <a:r>
-              <a:rPr sz="1500" b="1">
-                <a:solidFill>
-                  <a:srgbClr val="16A34A"/>
-                </a:solidFill>
-                <a:latin typeface="Calibri"/>
-              </a:rPr>
-              <a:t>▸  </a:t>
-            </a:r>
-            <a:r>
-              <a:rPr sz="1500" b="1">
-                <a:solidFill>
-                  <a:srgbClr val="1F2A37"/>
-                </a:solidFill>
-                <a:latin typeface="Calibri"/>
-              </a:rPr>
-              <a:t>Mantener PostgreSQL en vez de saltar a SQL Server. </a:t>
-            </a:r>
-            <a:r>
-              <a:rPr sz="1500" b="0">
-                <a:solidFill>
-                  <a:srgbClr val="1F2A37"/>
-                </a:solidFill>
-                <a:latin typeface="Calibri"/>
-              </a:rPr>
-              <a:t>La decision documentada en CLAUDE.md de no tocar el motor de BD a la vez que el lenguaje evito que los 3 casos reales de esta charla fueran 6, 9, o mas.</a:t>
-            </a:r>
-          </a:p>
-          <a:p>
-            <a:pPr>
-              <a:lnSpc>
-                <a:spcPct val="118000"/>
-              </a:lnSpc>
-              <a:spcAft>
-                <a:spcPts val="2304"/>
-              </a:spcAft>
-            </a:pPr>
-            <a:r>
-              <a:rPr sz="1500" b="1">
-                <a:solidFill>
-                  <a:srgbClr val="16A34A"/>
-                </a:solidFill>
-                <a:latin typeface="Calibri"/>
-              </a:rPr>
-              <a:t>▸  </a:t>
-            </a:r>
-            <a:r>
-              <a:rPr sz="1500" b="1">
-                <a:solidFill>
-                  <a:srgbClr val="1F2A37"/>
-                </a:solidFill>
-                <a:latin typeface="Calibri"/>
-              </a:rPr>
-              <a:t>No reescribir el frontend React. </a:t>
-            </a:r>
-            <a:r>
-              <a:rPr sz="1500" b="0">
-                <a:solidFill>
-                  <a:srgbClr val="1F2A37"/>
-                </a:solidFill>
-                <a:latin typeface="Calibri"/>
-              </a:rPr>
-              <a:t>Congelar ese cuarto eje de cambio dejo una sola fuente de verdad del contrato REST real contra la cual verificar cada ruta.</a:t>
-            </a:r>
-          </a:p>
-        </p:txBody>
-      </p:sp>
-      <p:sp>
-        <p:nvSpPr>
-          <p:cNvPr id="7" name="TextBox 6"/>
-          <p:cNvSpPr txBox="1"/>
-          <p:nvPr/>
-        </p:nvSpPr>
-        <p:spPr>
-          <a:xfrm>
-            <a:off x="502920" y="6510528"/>
-            <a:ext cx="8686800" cy="274320"/>
-          </a:xfrm>
-          <a:prstGeom prst="rect">
-            <a:avLst/>
-          </a:prstGeom>
-          <a:noFill/>
-        </p:spPr>
-        <p:txBody>
-          <a:bodyPr wrap="square" lIns="0" tIns="0" rIns="0" bIns="0" anchor="t">
-            <a:spAutoFit/>
-          </a:bodyPr>
-          <a:lstStyle/>
-          <a:p>
-            <a:pPr algn="l">
-              <a:lnSpc>
-                <a:spcPct val="115000"/>
-              </a:lnSpc>
-            </a:pPr>
-            <a:r>
-              <a:rPr sz="900" b="0" i="0">
-                <a:solidFill>
-                  <a:srgbClr val="667085"/>
-                </a:solidFill>
-                <a:latin typeface="Calibri"/>
-              </a:rPr>
-              <a:t>Migracion POS Farmacia — .NET Onion → Java Hexagonal</a:t>
-            </a:r>
-          </a:p>
-        </p:txBody>
-      </p:sp>
-      <p:sp>
-        <p:nvSpPr>
-          <p:cNvPr id="8" name="TextBox 7"/>
-          <p:cNvSpPr txBox="1"/>
-          <p:nvPr/>
-        </p:nvSpPr>
-        <p:spPr>
-          <a:xfrm>
-            <a:off x="11338560" y="6510528"/>
-            <a:ext cx="457200" cy="274320"/>
-          </a:xfrm>
-          <a:prstGeom prst="rect">
-            <a:avLst/>
-          </a:prstGeom>
-          <a:noFill/>
-        </p:spPr>
-        <p:txBody>
-          <a:bodyPr wrap="square" lIns="0" tIns="0" rIns="0" bIns="0" anchor="t">
-            <a:spAutoFit/>
-          </a:bodyPr>
-          <a:lstStyle/>
-          <a:p>
-            <a:pPr algn="r">
-              <a:lnSpc>
-                <a:spcPct val="115000"/>
-              </a:lnSpc>
-            </a:pPr>
-            <a:r>
-              <a:rPr sz="900" b="0" i="0">
-                <a:solidFill>
-                  <a:srgbClr val="667085"/>
-                </a:solidFill>
-                <a:latin typeface="Calibri"/>
-              </a:rPr>
-              <a:t>15</a:t>
-            </a:r>
-          </a:p>
-        </p:txBody>
-      </p:sp>
-    </p:spTree>
-  </p:cSld>
-  <p:clrMapOvr>
-    <a:masterClrMapping/>
-  </p:clrMapOvr>
-</p:sld>
-</file>
-
-<file path=ppt/slides/slide16.xml><?xml version="1.0" encoding="utf-8"?>
-<p:sld xmlns:a="http://schemas.openxmlformats.org/drawingml/2006/main" xmlns:r="http://schemas.openxmlformats.org/officeDocument/2006/relationships" xmlns:p="http://schemas.openxmlformats.org/presentationml/2006/main">
-  <p:cSld>
-    <p:spTree>
-      <p:nvGrpSpPr>
-        <p:cNvPr id="1" name=""/>
-        <p:cNvGrpSpPr/>
-        <p:nvPr/>
-      </p:nvGrpSpPr>
-      <p:grpSpPr>
-        <a:xfrm>
-          <a:off x="0" y="0"/>
-          <a:ext cx="0" cy="0"/>
-          <a:chOff x="0" y="0"/>
-          <a:chExt cx="0" cy="0"/>
-        </a:xfrm>
-      </p:grpSpPr>
-      <p:sp>
-        <p:nvSpPr>
-          <p:cNvPr id="2" name="Rectangle 1"/>
-          <p:cNvSpPr/>
-          <p:nvPr/>
-        </p:nvSpPr>
-        <p:spPr>
-          <a:xfrm>
-            <a:off x="0" y="0"/>
-            <a:ext cx="12191695" cy="6858000"/>
-          </a:xfrm>
-          <a:prstGeom prst="rect">
-            <a:avLst/>
-          </a:prstGeom>
-          <a:solidFill>
-            <a:srgbClr val="FFFFFF"/>
-          </a:solidFill>
-          <a:ln>
-            <a:noFill/>
-          </a:ln>
-          <a:effectLst/>
-        </p:spPr>
-        <p:style>
-          <a:lnRef idx="1">
-            <a:schemeClr val="accent1"/>
-          </a:lnRef>
-          <a:fillRef idx="3">
-            <a:schemeClr val="accent1"/>
-          </a:fillRef>
-          <a:effectRef idx="2">
-            <a:schemeClr val="accent1"/>
-          </a:effectRef>
-          <a:fontRef idx="minor">
-            <a:schemeClr val="lt1"/>
-          </a:fontRef>
-        </p:style>
-        <p:txBody>
-          <a:bodyPr rtlCol="0" anchor="ctr"/>
-          <a:lstStyle/>
-          <a:p>
-            <a:pPr algn="ctr"/>
-            <a:endParaRPr/>
-          </a:p>
-        </p:txBody>
-      </p:sp>
-      <p:sp>
-        <p:nvSpPr>
           <p:cNvPr id="3" name="Rectangle 2"/>
           <p:cNvSpPr/>
           <p:nvPr/>
@@ -9349,7 +9230,7 @@
           <a:lstStyle/>
           <a:p>
             <a:pPr algn="ctr"/>
-            <a:endParaRPr/>
+            <a:endParaRPr dirty="0"/>
           </a:p>
         </p:txBody>
       </p:sp>
@@ -9381,7 +9262,7 @@
               </a:lnSpc>
             </a:pPr>
             <a:r>
-              <a:rPr sz="1300" b="1" i="0">
+              <a:rPr sz="1300" b="1" i="0" dirty="0">
                 <a:solidFill>
                   <a:srgbClr val="E87A1E"/>
                 </a:solidFill>
@@ -9420,14 +9301,83 @@
               </a:lnSpc>
             </a:pPr>
             <a:r>
-              <a:rPr sz="3000" b="1" i="0">
+              <a:rPr sz="3000" b="1" i="0" dirty="0">
                 <a:solidFill>
                   <a:srgbClr val="1F2A37"/>
                 </a:solidFill>
                 <a:latin typeface="Calibri"/>
               </a:rPr>
-              <a:t>De que habla esta charla</a:t>
-            </a:r>
+              <a:t>De </a:t>
+            </a:r>
+            <a:r>
+              <a:rPr sz="3000" b="1" i="0" dirty="0" err="1">
+                <a:solidFill>
+                  <a:srgbClr val="1F2A37"/>
+                </a:solidFill>
+                <a:latin typeface="Calibri"/>
+              </a:rPr>
+              <a:t>que</a:t>
+            </a:r>
+            <a:r>
+              <a:rPr sz="3000" b="1" i="0" dirty="0">
+                <a:solidFill>
+                  <a:srgbClr val="1F2A37"/>
+                </a:solidFill>
+                <a:latin typeface="Calibri"/>
+              </a:rPr>
+              <a:t> </a:t>
+            </a:r>
+            <a:r>
+              <a:rPr sz="3000" b="1" i="0" dirty="0" err="1">
+                <a:solidFill>
+                  <a:srgbClr val="1F2A37"/>
+                </a:solidFill>
+                <a:latin typeface="Calibri"/>
+              </a:rPr>
+              <a:t>habla</a:t>
+            </a:r>
+            <a:r>
+              <a:rPr sz="3000" b="1" i="0" dirty="0">
+                <a:solidFill>
+                  <a:srgbClr val="1F2A37"/>
+                </a:solidFill>
+                <a:latin typeface="Calibri"/>
+              </a:rPr>
+              <a:t> </a:t>
+            </a:r>
+            <a:r>
+              <a:rPr sz="3000" b="1" i="0" dirty="0" err="1">
+                <a:solidFill>
+                  <a:srgbClr val="1F2A37"/>
+                </a:solidFill>
+                <a:latin typeface="Calibri"/>
+              </a:rPr>
+              <a:t>esta</a:t>
+            </a:r>
+            <a:r>
+              <a:rPr sz="3000" b="1" i="0" dirty="0">
+                <a:solidFill>
+                  <a:srgbClr val="1F2A37"/>
+                </a:solidFill>
+                <a:latin typeface="Calibri"/>
+              </a:rPr>
+              <a:t> </a:t>
+            </a:r>
+            <a:r>
+              <a:rPr sz="3000" b="1" i="0" dirty="0" err="1">
+                <a:solidFill>
+                  <a:srgbClr val="1F2A37"/>
+                </a:solidFill>
+                <a:latin typeface="Calibri"/>
+              </a:rPr>
+              <a:t>charla</a:t>
+            </a:r>
+            <a:endParaRPr sz="3000" b="1" i="0" dirty="0">
+              <a:solidFill>
+                <a:srgbClr val="1F2A37"/>
+              </a:solidFill>
+              <a:latin typeface="Calibri"/>
+            </a:endParaRPr>
           </a:p>
         </p:txBody>
       </p:sp>
@@ -15534,7 +15484,7 @@
                 </a:solidFill>
                 <a:latin typeface="Calibri"/>
               </a:rPr>
-              <a:t>El reactor Maven compilaba limpio.</a:t>
+              <a:t>Todo el proyecto compilaba sin errores.</a:t>
             </a:r>
           </a:p>
           <a:p>
@@ -15634,250 +15584,7 @@
                 </a:solidFill>
                 <a:latin typeface="Calibri"/>
               </a:rPr>
-              <a:t>Ningun</a:t>
-            </a:r>
-            <a:r>
-              <a:rPr sz="1600" b="0" i="0" dirty="0">
-                <a:solidFill>
-                  <a:srgbClr val="D8DEE4"/>
-                </a:solidFill>
-                <a:latin typeface="Calibri"/>
-              </a:rPr>
-              <a:t> test </a:t>
-            </a:r>
-            <a:r>
-              <a:rPr sz="1600" b="0" i="0" dirty="0" err="1">
-                <a:solidFill>
-                  <a:srgbClr val="D8DEE4"/>
-                </a:solidFill>
-                <a:latin typeface="Calibri"/>
-              </a:rPr>
-              <a:t>unitario</a:t>
-            </a:r>
-            <a:r>
-              <a:rPr sz="1600" b="0" i="0" dirty="0">
-                <a:solidFill>
-                  <a:srgbClr val="D8DEE4"/>
-                </a:solidFill>
-                <a:latin typeface="Calibri"/>
-              </a:rPr>
-              <a:t> </a:t>
-            </a:r>
-            <a:r>
-              <a:rPr sz="1600" b="0" i="0" dirty="0" err="1">
-                <a:solidFill>
-                  <a:srgbClr val="D8DEE4"/>
-                </a:solidFill>
-                <a:latin typeface="Calibri"/>
-              </a:rPr>
-              <a:t>levanta</a:t>
-            </a:r>
-            <a:r>
-              <a:rPr sz="1600" b="0" i="0" dirty="0">
-                <a:solidFill>
-                  <a:srgbClr val="D8DEE4"/>
-                </a:solidFill>
-                <a:latin typeface="Calibri"/>
-              </a:rPr>
-              <a:t> un </a:t>
-            </a:r>
-            <a:r>
-              <a:rPr sz="1600" b="0" i="0" dirty="0" err="1">
-                <a:solidFill>
-                  <a:srgbClr val="D8DEE4"/>
-                </a:solidFill>
-                <a:latin typeface="Calibri"/>
-              </a:rPr>
-              <a:t>servidor</a:t>
-            </a:r>
-            <a:r>
-              <a:rPr sz="1600" b="0" i="0" dirty="0">
-                <a:solidFill>
-                  <a:srgbClr val="D8DEE4"/>
-                </a:solidFill>
-                <a:latin typeface="Calibri"/>
-              </a:rPr>
-              <a:t> Spring real. </a:t>
-            </a:r>
-            <a:r>
-              <a:rPr sz="1600" b="0" i="0" dirty="0" err="1">
-                <a:solidFill>
-                  <a:srgbClr val="D8DEE4"/>
-                </a:solidFill>
-                <a:latin typeface="Calibri"/>
-              </a:rPr>
-              <a:t>Ninguno</a:t>
-            </a:r>
-            <a:r>
-              <a:rPr sz="1600" b="0" i="0" dirty="0">
-                <a:solidFill>
-                  <a:srgbClr val="D8DEE4"/>
-                </a:solidFill>
-                <a:latin typeface="Calibri"/>
-              </a:rPr>
-              <a:t> </a:t>
-            </a:r>
-            <a:r>
-              <a:rPr sz="1600" b="0" i="0" dirty="0" err="1">
-                <a:solidFill>
-                  <a:srgbClr val="D8DEE4"/>
-                </a:solidFill>
-                <a:latin typeface="Calibri"/>
-              </a:rPr>
-              <a:t>abre</a:t>
-            </a:r>
-            <a:r>
-              <a:rPr sz="1600" b="0" i="0" dirty="0">
-                <a:solidFill>
-                  <a:srgbClr val="D8DEE4"/>
-                </a:solidFill>
-                <a:latin typeface="Calibri"/>
-              </a:rPr>
-              <a:t> un </a:t>
-            </a:r>
-            <a:r>
-              <a:rPr sz="1600" b="0" i="0" dirty="0" err="1">
-                <a:solidFill>
-                  <a:srgbClr val="D8DEE4"/>
-                </a:solidFill>
-                <a:latin typeface="Calibri"/>
-              </a:rPr>
-              <a:t>navegador</a:t>
-            </a:r>
-            <a:r>
-              <a:rPr sz="1600" b="0" i="0" dirty="0">
-                <a:solidFill>
-                  <a:srgbClr val="D8DEE4"/>
-                </a:solidFill>
-                <a:latin typeface="Calibri"/>
-              </a:rPr>
-              <a:t>. </a:t>
-            </a:r>
-            <a:r>
-              <a:rPr sz="1600" b="0" i="0" dirty="0" err="1">
-                <a:solidFill>
-                  <a:srgbClr val="D8DEE4"/>
-                </a:solidFill>
-                <a:latin typeface="Calibri"/>
-              </a:rPr>
-              <a:t>Ninguno</a:t>
-            </a:r>
-            <a:r>
-              <a:rPr sz="1600" b="0" i="0" dirty="0">
-                <a:solidFill>
-                  <a:srgbClr val="D8DEE4"/>
-                </a:solidFill>
-                <a:latin typeface="Calibri"/>
-              </a:rPr>
-              <a:t> </a:t>
-            </a:r>
-            <a:r>
-              <a:rPr sz="1600" b="0" i="0" dirty="0" err="1">
-                <a:solidFill>
-                  <a:srgbClr val="D8DEE4"/>
-                </a:solidFill>
-                <a:latin typeface="Calibri"/>
-              </a:rPr>
-              <a:t>prueba</a:t>
-            </a:r>
-            <a:r>
-              <a:rPr sz="1600" b="0" i="0" dirty="0">
-                <a:solidFill>
-                  <a:srgbClr val="D8DEE4"/>
-                </a:solidFill>
-                <a:latin typeface="Calibri"/>
-              </a:rPr>
-              <a:t> </a:t>
-            </a:r>
-            <a:r>
-              <a:rPr sz="1600" b="0" i="0" dirty="0" err="1">
-                <a:solidFill>
-                  <a:srgbClr val="D8DEE4"/>
-                </a:solidFill>
-                <a:latin typeface="Calibri"/>
-              </a:rPr>
-              <a:t>que</a:t>
-            </a:r>
-            <a:r>
-              <a:rPr sz="1600" b="0" i="0" dirty="0">
-                <a:solidFill>
-                  <a:srgbClr val="D8DEE4"/>
-                </a:solidFill>
-                <a:latin typeface="Calibri"/>
-              </a:rPr>
-              <a:t> dos </a:t>
-            </a:r>
-            <a:r>
-              <a:rPr sz="1600" b="0" i="0" dirty="0" err="1">
-                <a:solidFill>
-                  <a:srgbClr val="D8DEE4"/>
-                </a:solidFill>
-                <a:latin typeface="Calibri"/>
-              </a:rPr>
-              <a:t>contenedores</a:t>
-            </a:r>
-            <a:r>
-              <a:rPr sz="1600" b="0" i="0" dirty="0">
-                <a:solidFill>
-                  <a:srgbClr val="D8DEE4"/>
-                </a:solidFill>
-                <a:latin typeface="Calibri"/>
-              </a:rPr>
-              <a:t> Docker se </a:t>
-            </a:r>
-            <a:r>
-              <a:rPr sz="1600" b="0" i="0" dirty="0" err="1">
-                <a:solidFill>
-                  <a:srgbClr val="D8DEE4"/>
-                </a:solidFill>
-                <a:latin typeface="Calibri"/>
-              </a:rPr>
-              <a:t>hablen</a:t>
-            </a:r>
-            <a:r>
-              <a:rPr sz="1600" b="0" i="0" dirty="0">
-                <a:solidFill>
-                  <a:srgbClr val="D8DEE4"/>
-                </a:solidFill>
-                <a:latin typeface="Calibri"/>
-              </a:rPr>
-              <a:t> entre </a:t>
-            </a:r>
-            <a:r>
-              <a:rPr sz="1600" b="0" i="0" dirty="0" err="1">
-                <a:solidFill>
-                  <a:srgbClr val="D8DEE4"/>
-                </a:solidFill>
-                <a:latin typeface="Calibri"/>
-              </a:rPr>
-              <a:t>si</a:t>
-            </a:r>
-            <a:r>
-              <a:rPr sz="1600" b="0" i="0" dirty="0">
-                <a:solidFill>
-                  <a:srgbClr val="D8DEE4"/>
-                </a:solidFill>
-                <a:latin typeface="Calibri"/>
-              </a:rPr>
-              <a:t> </a:t>
-            </a:r>
-            <a:r>
-              <a:rPr sz="1600" b="0" i="0" dirty="0" err="1">
-                <a:solidFill>
-                  <a:srgbClr val="D8DEE4"/>
-                </a:solidFill>
-                <a:latin typeface="Calibri"/>
-              </a:rPr>
-              <a:t>por</a:t>
-            </a:r>
-            <a:r>
-              <a:rPr sz="1600" b="0" i="0" dirty="0">
-                <a:solidFill>
-                  <a:srgbClr val="D8DEE4"/>
-                </a:solidFill>
-                <a:latin typeface="Calibri"/>
-              </a:rPr>
-              <a:t> la red.</a:t>
+              <a:t>Un test unitario es un metodo Java que crea un objeto y revisa su comportamiento con asserts — corre en menos de un segundo, sin red, sin base de datos, sin levantar nada. Por eso ninguno de los 74 levanta el backend real (Spring), ninguno abre el navegador, y ninguno prueba que el backend y la base de datos —cada uno en su propio contenedor Docker— se hablen bien entre si.</a:t>
             </a:r>
             <a:endParaRPr lang="es-MX" sz="1600" b="0" i="0" dirty="0">
               <a:solidFill>
@@ -15912,142 +15619,7 @@
                 </a:solidFill>
                 <a:latin typeface="Calibri"/>
               </a:rPr>
-              <a:t>Los tres bugs que siguen solo existieron el </a:t>
-            </a:r>
-            <a:r>
-              <a:rPr lang="es-ES" sz="1600" b="0" i="0" dirty="0" err="1">
-                <a:solidFill>
-                  <a:srgbClr val="D8DEE4"/>
-                </a:solidFill>
-                <a:latin typeface="Calibri"/>
-              </a:rPr>
-              <a:t>dia</a:t>
-            </a:r>
-            <a:r>
-              <a:rPr lang="es-ES" sz="1600" b="0" i="0" dirty="0">
-                <a:solidFill>
-                  <a:srgbClr val="D8DEE4"/>
-                </a:solidFill>
-                <a:latin typeface="Calibri"/>
-              </a:rPr>
-              <a:t> </a:t>
-            </a:r>
-            <a:r>
-              <a:rPr lang="es-MX" sz="1600" b="0" i="0" dirty="0">
-                <a:solidFill>
-                  <a:srgbClr val="D8DEE4"/>
-                </a:solidFill>
-                <a:latin typeface="Calibri"/>
-              </a:rPr>
-              <a:t>q</a:t>
-            </a:r>
-            <a:r>
-              <a:rPr lang="es-ES" sz="1600" b="0" i="0" dirty="0" err="1">
-                <a:solidFill>
-                  <a:srgbClr val="D8DEE4"/>
-                </a:solidFill>
-                <a:latin typeface="Calibri"/>
-              </a:rPr>
-              <a:t>ue</a:t>
-            </a:r>
-            <a:r>
-              <a:rPr lang="es-ES" sz="1600" b="0" i="0" dirty="0">
-                <a:solidFill>
-                  <a:srgbClr val="D8DEE4"/>
-                </a:solidFill>
-                <a:latin typeface="Calibri"/>
-              </a:rPr>
-              <a:t> se </a:t>
-            </a:r>
-            <a:r>
-              <a:rPr lang="es-ES" sz="1600" b="0" i="0" dirty="0" err="1">
-                <a:solidFill>
-                  <a:srgbClr val="D8DEE4"/>
-                </a:solidFill>
-                <a:latin typeface="Calibri"/>
-              </a:rPr>
-              <a:t>corrio</a:t>
-            </a:r>
-            <a:r>
-              <a:rPr lang="es-ES" sz="1600" b="0" i="0" dirty="0">
-                <a:solidFill>
-                  <a:srgbClr val="D8DEE4"/>
-                </a:solidFill>
-                <a:latin typeface="Calibri"/>
-              </a:rPr>
-              <a:t> “</a:t>
-            </a:r>
-            <a:r>
-              <a:rPr lang="es-ES" sz="1600" b="0" i="0" dirty="0" err="1">
-                <a:solidFill>
-                  <a:srgbClr val="D8DEE4"/>
-                </a:solidFill>
-                <a:latin typeface="Calibri"/>
-              </a:rPr>
-              <a:t>docker</a:t>
-            </a:r>
-            <a:r>
-              <a:rPr lang="es-ES" sz="1600" b="0" i="0" dirty="0">
-                <a:solidFill>
-                  <a:srgbClr val="D8DEE4"/>
-                </a:solidFill>
-                <a:latin typeface="Calibri"/>
-              </a:rPr>
-              <a:t> </a:t>
-            </a:r>
-            <a:r>
-              <a:rPr lang="es-ES" sz="1600" b="0" i="0" dirty="0" err="1">
-                <a:solidFill>
-                  <a:srgbClr val="D8DEE4"/>
-                </a:solidFill>
-                <a:latin typeface="Calibri"/>
-              </a:rPr>
-              <a:t>compose</a:t>
-            </a:r>
-            <a:r>
-              <a:rPr lang="es-ES" sz="1600" b="0" i="0" dirty="0">
-                <a:solidFill>
-                  <a:srgbClr val="D8DEE4"/>
-                </a:solidFill>
-                <a:latin typeface="Calibri"/>
-              </a:rPr>
-              <a:t> up” de verdad y se hizo login desde el navegador — exactamente el mismo </a:t>
-            </a:r>
-            <a:r>
-              <a:rPr lang="es-ES" sz="1600" b="0" i="0" dirty="0" err="1">
-                <a:solidFill>
-                  <a:srgbClr val="D8DEE4"/>
-                </a:solidFill>
-                <a:latin typeface="Calibri"/>
-              </a:rPr>
-              <a:t>dia</a:t>
-            </a:r>
-            <a:r>
-              <a:rPr lang="es-ES" sz="1600" b="0" i="0" dirty="0">
-                <a:solidFill>
-                  <a:srgbClr val="D8DEE4"/>
-                </a:solidFill>
-                <a:latin typeface="Calibri"/>
-              </a:rPr>
-              <a:t> de esta </a:t>
-            </a:r>
-            <a:r>
-              <a:rPr lang="es-ES" sz="1600" b="0" i="0" dirty="0" err="1">
-                <a:solidFill>
-                  <a:srgbClr val="D8DEE4"/>
-                </a:solidFill>
-                <a:latin typeface="Calibri"/>
-              </a:rPr>
-              <a:t>sesion</a:t>
-            </a:r>
-            <a:r>
-              <a:rPr lang="es-ES" sz="1600" b="0" i="0" dirty="0">
-                <a:solidFill>
-                  <a:srgbClr val="D8DEE4"/>
-                </a:solidFill>
-                <a:latin typeface="Calibri"/>
-              </a:rPr>
-              <a:t>.</a:t>
+              <a:t>Los tres errores que siguen solo aparecieron el dia que se levanto todo el sistema de verdad con “docker compose up” y se probo el login desde el navegador — el mismo dia de esta sesion.</a:t>
             </a:r>
           </a:p>
         </p:txBody>
@@ -16488,7 +16060,7 @@
                 </a:solidFill>
                 <a:latin typeface="Calibri"/>
               </a:rPr>
-              <a:t>Promociones y Clientes/Seguros/Credito tenían controllers, casos de uso y adaptadores de persistencia completos — pero la aplicación Spring jamás hubiera podido arrancar.</a:t>
+              <a:t>Promociones y Clientes/Seguros/Credito tenían controllers, casos de uso y adaptadores de persistencia completos — pero el backend jamás hubiera podido arrancar.</a:t>
             </a:r>
           </a:p>
         </p:txBody>
@@ -16658,7 +16230,7 @@
                 </a:solidFill>
                 <a:latin typeface="Calibri"/>
               </a:rPr>
-              <a:t>No existía ninguna clase @Configuration que cablee esos 15 casos de uso como @Bean. Un @Bean con un parámetro sin implementación registrada COMPILA bien — Spring recien resuelve la inyección en tiempo de ejecución, no en compilación.</a:t>
+              <a:t>Le faltaba la “lista de conexiones”: la clase que le dice a Spring (el framework que arranca y conecta todo el backend) qué implementación real usar para cada caso de uso —en Spring esto se llama un @Bean. Sin esa lista el código compila igual (Java no revisa en tiempo de compilación si algo quedó sin conectar), pero Spring no tiene con qué arrancar esos 15 casos de uso.</a:t>
             </a:r>
           </a:p>
         </p:txBody>
@@ -16828,7 +16400,7 @@
                 </a:solidFill>
                 <a:latin typeface="Calibri"/>
               </a:rPr>
-              <a:t>Se creo PromocionUseCaseConfiguration y ClienteSeguroCreditoUseCaseConfiguration, y se verificó con un cruce sistemático que ninguna otra interfaz UseCase quedaba sin su @Bean.</a:t>
+              <a:t>Se creó esa lista de conexiones que faltaba (PromocionUseCaseConfiguration y ClienteSeguroCreditoUseCaseConfiguration) y se revisó una por una que ninguna otra interfaz de caso de uso se hubiera quedado sin su implementación conectada.</a:t>
             </a:r>
           </a:p>
         </p:txBody>

--- a/docs/Complejidad_Migracion_NET_a_Java_Hexagonal.pptx
+++ b/docs/Complejidad_Migracion_NET_a_Java_Hexagonal.pptx
@@ -7048,13 +7048,391 @@
               </a:lnSpc>
             </a:pPr>
             <a:r>
-              <a:rPr sz="1130" b="0" i="0">
+              <a:rPr sz="1130" b="0" i="0" dirty="0">
                 <a:solidFill>
                   <a:srgbClr val="667085"/>
                 </a:solidFill>
                 <a:latin typeface="Calibri"/>
               </a:rPr>
-              <a:t>lower(bytea) es un bug propio de Postgres. SQL Server, en muchas de sus configuraciones de texto (collations), no distingue mayúsculas de minúsculas por defecto — ahí el riesgo habría sido el opuesto: búsquedas que traen resultados de más (falsos positivos).</a:t>
+              <a:t>lower(</a:t>
+            </a:r>
+            <a:r>
+              <a:rPr sz="1130" b="0" i="0" dirty="0" err="1">
+                <a:solidFill>
+                  <a:srgbClr val="667085"/>
+                </a:solidFill>
+                <a:latin typeface="Calibri"/>
+              </a:rPr>
+              <a:t>bytea</a:t>
+            </a:r>
+            <a:r>
+              <a:rPr sz="1130" b="0" i="0" dirty="0">
+                <a:solidFill>
+                  <a:srgbClr val="667085"/>
+                </a:solidFill>
+                <a:latin typeface="Calibri"/>
+              </a:rPr>
+              <a:t>) es un bug </a:t>
+            </a:r>
+            <a:r>
+              <a:rPr sz="1130" b="0" i="0" dirty="0" err="1">
+                <a:solidFill>
+                  <a:srgbClr val="667085"/>
+                </a:solidFill>
+                <a:latin typeface="Calibri"/>
+              </a:rPr>
+              <a:t>propio</a:t>
+            </a:r>
+            <a:r>
+              <a:rPr sz="1130" b="0" i="0" dirty="0">
+                <a:solidFill>
+                  <a:srgbClr val="667085"/>
+                </a:solidFill>
+                <a:latin typeface="Calibri"/>
+              </a:rPr>
+              <a:t> de Postgres. SQL Server, </a:t>
+            </a:r>
+            <a:r>
+              <a:rPr sz="1130" b="0" i="0" dirty="0" err="1">
+                <a:solidFill>
+                  <a:srgbClr val="667085"/>
+                </a:solidFill>
+                <a:latin typeface="Calibri"/>
+              </a:rPr>
+              <a:t>en</a:t>
+            </a:r>
+            <a:r>
+              <a:rPr sz="1130" b="0" i="0" dirty="0">
+                <a:solidFill>
+                  <a:srgbClr val="667085"/>
+                </a:solidFill>
+                <a:latin typeface="Calibri"/>
+              </a:rPr>
+              <a:t> </a:t>
+            </a:r>
+            <a:r>
+              <a:rPr sz="1130" b="0" i="0" dirty="0" err="1">
+                <a:solidFill>
+                  <a:srgbClr val="667085"/>
+                </a:solidFill>
+                <a:latin typeface="Calibri"/>
+              </a:rPr>
+              <a:t>muchas</a:t>
+            </a:r>
+            <a:r>
+              <a:rPr sz="1130" b="0" i="0" dirty="0">
+                <a:solidFill>
+                  <a:srgbClr val="667085"/>
+                </a:solidFill>
+                <a:latin typeface="Calibri"/>
+              </a:rPr>
+              <a:t> de sus </a:t>
+            </a:r>
+            <a:r>
+              <a:rPr sz="1130" b="0" i="0" dirty="0" err="1">
+                <a:solidFill>
+                  <a:srgbClr val="667085"/>
+                </a:solidFill>
+                <a:latin typeface="Calibri"/>
+              </a:rPr>
+              <a:t>configuraciones</a:t>
+            </a:r>
+            <a:r>
+              <a:rPr sz="1130" b="0" i="0" dirty="0">
+                <a:solidFill>
+                  <a:srgbClr val="667085"/>
+                </a:solidFill>
+                <a:latin typeface="Calibri"/>
+              </a:rPr>
+              <a:t> de </a:t>
+            </a:r>
+            <a:r>
+              <a:rPr sz="1130" b="0" i="0" dirty="0" err="1">
+                <a:solidFill>
+                  <a:srgbClr val="667085"/>
+                </a:solidFill>
+                <a:latin typeface="Calibri"/>
+              </a:rPr>
+              <a:t>texto</a:t>
+            </a:r>
+            <a:r>
+              <a:rPr sz="1130" b="0" i="0" dirty="0">
+                <a:solidFill>
+                  <a:srgbClr val="667085"/>
+                </a:solidFill>
+                <a:latin typeface="Calibri"/>
+              </a:rPr>
+              <a:t> (collations), no distingue </a:t>
+            </a:r>
+            <a:r>
+              <a:rPr sz="1130" b="0" i="0" dirty="0" err="1">
+                <a:solidFill>
+                  <a:srgbClr val="667085"/>
+                </a:solidFill>
+                <a:latin typeface="Calibri"/>
+              </a:rPr>
+              <a:t>mayúsculas</a:t>
+            </a:r>
+            <a:r>
+              <a:rPr sz="1130" b="0" i="0" dirty="0">
+                <a:solidFill>
+                  <a:srgbClr val="667085"/>
+                </a:solidFill>
+                <a:latin typeface="Calibri"/>
+              </a:rPr>
+              <a:t> de </a:t>
+            </a:r>
+            <a:r>
+              <a:rPr sz="1130" b="0" i="0" dirty="0" err="1">
+                <a:solidFill>
+                  <a:srgbClr val="667085"/>
+                </a:solidFill>
+                <a:latin typeface="Calibri"/>
+              </a:rPr>
+              <a:t>minúsculas</a:t>
+            </a:r>
+            <a:r>
+              <a:rPr sz="1130" b="0" i="0" dirty="0">
+                <a:solidFill>
+                  <a:srgbClr val="667085"/>
+                </a:solidFill>
+                <a:latin typeface="Calibri"/>
+              </a:rPr>
+              <a:t> </a:t>
+            </a:r>
+            <a:r>
+              <a:rPr sz="1130" b="0" i="0" dirty="0" err="1">
+                <a:solidFill>
+                  <a:srgbClr val="667085"/>
+                </a:solidFill>
+                <a:latin typeface="Calibri"/>
+              </a:rPr>
+              <a:t>por</a:t>
+            </a:r>
+            <a:r>
+              <a:rPr sz="1130" b="0" i="0" dirty="0">
+                <a:solidFill>
+                  <a:srgbClr val="667085"/>
+                </a:solidFill>
+                <a:latin typeface="Calibri"/>
+              </a:rPr>
+              <a:t> </a:t>
+            </a:r>
+            <a:r>
+              <a:rPr sz="1130" b="0" i="0" dirty="0" err="1">
+                <a:solidFill>
+                  <a:srgbClr val="667085"/>
+                </a:solidFill>
+                <a:latin typeface="Calibri"/>
+              </a:rPr>
+              <a:t>defecto</a:t>
+            </a:r>
+            <a:r>
+              <a:rPr sz="1130" b="0" i="0" dirty="0">
+                <a:solidFill>
+                  <a:srgbClr val="667085"/>
+                </a:solidFill>
+                <a:latin typeface="Calibri"/>
+              </a:rPr>
+              <a:t> — ahí el </a:t>
+            </a:r>
+            <a:r>
+              <a:rPr sz="1130" b="0" i="0" dirty="0" err="1">
+                <a:solidFill>
+                  <a:srgbClr val="667085"/>
+                </a:solidFill>
+                <a:latin typeface="Calibri"/>
+              </a:rPr>
+              <a:t>riesgo</a:t>
+            </a:r>
+            <a:r>
+              <a:rPr sz="1130" b="0" i="0" dirty="0">
+                <a:solidFill>
+                  <a:srgbClr val="667085"/>
+                </a:solidFill>
+                <a:latin typeface="Calibri"/>
+              </a:rPr>
+              <a:t> </a:t>
+            </a:r>
+            <a:r>
+              <a:rPr sz="1130" b="0" i="0" dirty="0" err="1">
+                <a:solidFill>
+                  <a:srgbClr val="667085"/>
+                </a:solidFill>
+                <a:latin typeface="Calibri"/>
+              </a:rPr>
+              <a:t>habría</a:t>
+            </a:r>
+            <a:r>
+              <a:rPr sz="1130" b="0" i="0" dirty="0">
+                <a:solidFill>
+                  <a:srgbClr val="667085"/>
+                </a:solidFill>
+                <a:latin typeface="Calibri"/>
+              </a:rPr>
+              <a:t> </a:t>
+            </a:r>
+            <a:r>
+              <a:rPr sz="1130" b="0" i="0" dirty="0" err="1">
+                <a:solidFill>
+                  <a:srgbClr val="667085"/>
+                </a:solidFill>
+                <a:latin typeface="Calibri"/>
+              </a:rPr>
+              <a:t>sido</a:t>
+            </a:r>
+            <a:r>
+              <a:rPr sz="1130" b="0" i="0" dirty="0">
+                <a:solidFill>
+                  <a:srgbClr val="667085"/>
+                </a:solidFill>
+                <a:latin typeface="Calibri"/>
+              </a:rPr>
+              <a:t> el </a:t>
+            </a:r>
+            <a:r>
+              <a:rPr sz="1130" b="0" i="0" dirty="0" err="1">
+                <a:solidFill>
+                  <a:srgbClr val="667085"/>
+                </a:solidFill>
+                <a:latin typeface="Calibri"/>
+              </a:rPr>
+              <a:t>opuesto</a:t>
+            </a:r>
+            <a:r>
+              <a:rPr sz="1130" b="0" i="0" dirty="0">
+                <a:solidFill>
+                  <a:srgbClr val="667085"/>
+                </a:solidFill>
+                <a:latin typeface="Calibri"/>
+              </a:rPr>
+              <a:t>: </a:t>
+            </a:r>
+            <a:r>
+              <a:rPr sz="1130" b="0" i="0" dirty="0" err="1">
+                <a:solidFill>
+                  <a:srgbClr val="667085"/>
+                </a:solidFill>
+                <a:latin typeface="Calibri"/>
+              </a:rPr>
+              <a:t>búsquedas</a:t>
+            </a:r>
+            <a:r>
+              <a:rPr sz="1130" b="0" i="0" dirty="0">
+                <a:solidFill>
+                  <a:srgbClr val="667085"/>
+                </a:solidFill>
+                <a:latin typeface="Calibri"/>
+              </a:rPr>
+              <a:t> </a:t>
+            </a:r>
+            <a:r>
+              <a:rPr sz="1130" b="0" i="0" dirty="0" err="1">
+                <a:solidFill>
+                  <a:srgbClr val="667085"/>
+                </a:solidFill>
+                <a:latin typeface="Calibri"/>
+              </a:rPr>
+              <a:t>que</a:t>
+            </a:r>
+            <a:r>
+              <a:rPr sz="1130" b="0" i="0" dirty="0">
+                <a:solidFill>
+                  <a:srgbClr val="667085"/>
+                </a:solidFill>
+                <a:latin typeface="Calibri"/>
+              </a:rPr>
+              <a:t> </a:t>
+            </a:r>
+            <a:r>
+              <a:rPr sz="1130" b="0" i="0" dirty="0" err="1">
+                <a:solidFill>
+                  <a:srgbClr val="667085"/>
+                </a:solidFill>
+                <a:latin typeface="Calibri"/>
+              </a:rPr>
+              <a:t>traen</a:t>
+            </a:r>
+            <a:r>
+              <a:rPr sz="1130" b="0" i="0" dirty="0">
+                <a:solidFill>
+                  <a:srgbClr val="667085"/>
+                </a:solidFill>
+                <a:latin typeface="Calibri"/>
+              </a:rPr>
+              <a:t> </a:t>
+            </a:r>
+            <a:r>
+              <a:rPr sz="1130" b="0" i="0" dirty="0" err="1">
+                <a:solidFill>
+                  <a:srgbClr val="667085"/>
+                </a:solidFill>
+                <a:latin typeface="Calibri"/>
+              </a:rPr>
+              <a:t>resultados</a:t>
+            </a:r>
+            <a:r>
+              <a:rPr sz="1130" b="0" i="0" dirty="0">
+                <a:solidFill>
+                  <a:srgbClr val="667085"/>
+                </a:solidFill>
+                <a:latin typeface="Calibri"/>
+              </a:rPr>
+              <a:t> de </a:t>
+            </a:r>
+            <a:r>
+              <a:rPr sz="1130" b="0" i="0" dirty="0" err="1">
+                <a:solidFill>
+                  <a:srgbClr val="667085"/>
+                </a:solidFill>
+                <a:latin typeface="Calibri"/>
+              </a:rPr>
+              <a:t>más</a:t>
+            </a:r>
+            <a:r>
+              <a:rPr sz="1130" b="0" i="0" dirty="0">
+                <a:solidFill>
+                  <a:srgbClr val="667085"/>
+                </a:solidFill>
+                <a:latin typeface="Calibri"/>
+              </a:rPr>
+              <a:t> (</a:t>
+            </a:r>
+            <a:r>
+              <a:rPr sz="1130" b="0" i="0" dirty="0" err="1">
+                <a:solidFill>
+                  <a:srgbClr val="667085"/>
+                </a:solidFill>
+                <a:latin typeface="Calibri"/>
+              </a:rPr>
+              <a:t>falsos</a:t>
+            </a:r>
+            <a:r>
+              <a:rPr sz="1130" b="0" i="0" dirty="0">
+                <a:solidFill>
+                  <a:srgbClr val="667085"/>
+                </a:solidFill>
+                <a:latin typeface="Calibri"/>
+              </a:rPr>
+              <a:t> </a:t>
+            </a:r>
+            <a:r>
+              <a:rPr sz="1130" b="0" i="0" dirty="0" err="1">
+                <a:solidFill>
+                  <a:srgbClr val="667085"/>
+                </a:solidFill>
+                <a:latin typeface="Calibri"/>
+              </a:rPr>
+              <a:t>positivos</a:t>
+            </a:r>
+            <a:r>
+              <a:rPr sz="1130" b="0" i="0" dirty="0">
+                <a:solidFill>
+                  <a:srgbClr val="667085"/>
+                </a:solidFill>
+                <a:latin typeface="Calibri"/>
+              </a:rPr>
+              <a:t>).</a:t>
             </a:r>
           </a:p>
         </p:txBody>
